--- a/docs/video-scripts/slides/pptx/module-4/lesson-4-1-formulas.pptx
+++ b/docs/video-scripts/slides/pptx/module-4/lesson-4-1-formulas.pptx
@@ -3215,7 +3215,7 @@
                 </a:solidFill>
                 <a:latin typeface="Petrona"/>
               </a:rPr>
-              <a:t>AI-Powered Formulas</a:t>
+              <a:t>$32M Schedule of Values</a:t>
             </a:r>
           </a:p>
         </p:txBody>
@@ -3254,7 +3254,7 @@
                 </a:solidFill>
                 <a:latin typeface="Inter"/>
               </a:rPr>
-              <a:t>Stop Googling. Start describing.</a:t>
+              <a:t>Real-shaped formulas. Real verification. Downloadable.</a:t>
             </a:r>
           </a:p>
         </p:txBody>
@@ -3358,7 +3358,7 @@
                 </a:solidFill>
                 <a:latin typeface="Inter"/>
               </a:rPr>
-              <a:t>WHAT YOU'RE LEARNING</a:t>
+              <a:t>THE WORKBOOK</a:t>
             </a:r>
           </a:p>
         </p:txBody>
@@ -3397,7 +3397,7 @@
                 </a:solidFill>
                 <a:latin typeface="Petrona"/>
               </a:rPr>
-              <a:t>Conditional logic, in plain English</a:t>
+              <a:t>21 line items. 7 divisions. 8 formulas.</a:t>
             </a:r>
           </a:p>
         </p:txBody>
@@ -3480,7 +3480,7 @@
                 </a:solidFill>
                 <a:latin typeface="Inter"/>
               </a:rPr>
-              <a:t>Describe the rule — "OVER BUDGET if Spent &gt; Budget."</a:t>
+              <a:t>•  Inputs filled in: Total Contract, Previously, This Period</a:t>
             </a:r>
           </a:p>
           <a:p>
@@ -3496,7 +3496,7 @@
                 </a:solidFill>
                 <a:latin typeface="Inter"/>
               </a:rPr>
-              <a:t>AI writes the formula (IF / IFS / SWITCH).</a:t>
+              <a:t>•  You write: Total Billed · % Complete · Remaining · Retention · Net Earned · Status</a:t>
             </a:r>
           </a:p>
           <a:p>
@@ -3512,7 +3512,7 @@
                 </a:solidFill>
                 <a:latin typeface="Inter"/>
               </a:rPr>
-              <a:t>Watch for absolute vs relative references ($B$2 vs B2).</a:t>
+              <a:t>•  Plus: SUMIFS division subtotals + project total row</a:t>
             </a:r>
           </a:p>
         </p:txBody>
@@ -3743,7 +3743,7 @@
                 </a:solidFill>
                 <a:latin typeface="Petrona"/>
               </a:rPr>
-              <a:t>Plug in numbers where you already know the answer.</a:t>
+              <a:t>$32M means a wrong formula = real-money mistake.</a:t>
             </a:r>
           </a:p>
           <a:p>
@@ -3759,7 +3759,7 @@
                 </a:solidFill>
                 <a:latin typeface="Petrona"/>
               </a:rPr>
-              <a:t>If the formula gives the wrong result — find out now.</a:t>
+              <a:t>Test with known rows. Project % complete is weighted, never averaged.</a:t>
             </a:r>
           </a:p>
         </p:txBody>

--- a/docs/video-scripts/slides/pptx/module-4/lesson-4-1-formulas.pptx
+++ b/docs/video-scripts/slides/pptx/module-4/lesson-4-1-formulas.pptx
@@ -3170,7 +3170,7 @@
               </a:lnSpc>
             </a:pPr>
             <a:r>
-              <a:rPr sz="1400" b="1">
+              <a:rPr sz="1400" b="1" i="0">
                 <a:solidFill>
                   <a:srgbClr val="2B6E2B"/>
                 </a:solidFill>
@@ -3209,7 +3209,7 @@
               </a:lnSpc>
             </a:pPr>
             <a:r>
-              <a:rPr sz="5400" b="1">
+              <a:rPr sz="5400" b="1" i="0">
                 <a:solidFill>
                   <a:srgbClr val="030303"/>
                 </a:solidFill>
@@ -3248,7 +3248,7 @@
               </a:lnSpc>
             </a:pPr>
             <a:r>
-              <a:rPr sz="2200" b="0">
+              <a:rPr sz="2200" b="0" i="0">
                 <a:solidFill>
                   <a:srgbClr val="272525"/>
                 </a:solidFill>
@@ -3287,7 +3287,7 @@
               </a:lnSpc>
             </a:pPr>
             <a:r>
-              <a:rPr sz="1100" b="1">
+              <a:rPr sz="1100" b="1" i="0">
                 <a:solidFill>
                   <a:srgbClr val="2B6E2B"/>
                 </a:solidFill>
@@ -3352,7 +3352,7 @@
               </a:lnSpc>
             </a:pPr>
             <a:r>
-              <a:rPr sz="1200" b="1">
+              <a:rPr sz="1200" b="1" i="0">
                 <a:solidFill>
                   <a:srgbClr val="2B6E2B"/>
                 </a:solidFill>
@@ -3391,7 +3391,7 @@
               </a:lnSpc>
             </a:pPr>
             <a:r>
-              <a:rPr sz="4200" b="1">
+              <a:rPr sz="4200" b="1" i="0">
                 <a:solidFill>
                   <a:srgbClr val="030303"/>
                 </a:solidFill>
@@ -3474,7 +3474,7 @@
               </a:lnSpc>
             </a:pPr>
             <a:r>
-              <a:rPr sz="2200" b="0">
+              <a:rPr sz="2200" b="0" i="0">
                 <a:solidFill>
                   <a:srgbClr val="272525"/>
                 </a:solidFill>
@@ -3490,7 +3490,7 @@
               </a:lnSpc>
             </a:pPr>
             <a:r>
-              <a:rPr sz="2200" b="0">
+              <a:rPr sz="2200" b="0" i="0">
                 <a:solidFill>
                   <a:srgbClr val="272525"/>
                 </a:solidFill>
@@ -3506,7 +3506,7 @@
               </a:lnSpc>
             </a:pPr>
             <a:r>
-              <a:rPr sz="2200" b="0">
+              <a:rPr sz="2200" b="0" i="0">
                 <a:solidFill>
                   <a:srgbClr val="272525"/>
                 </a:solidFill>
@@ -3571,7 +3571,7 @@
               </a:lnSpc>
             </a:pPr>
             <a:r>
-              <a:rPr sz="1200" b="1">
+              <a:rPr sz="1200" b="1" i="0">
                 <a:solidFill>
                   <a:srgbClr val="2B6E2B"/>
                 </a:solidFill>
@@ -3610,7 +3610,7 @@
               </a:lnSpc>
             </a:pPr>
             <a:r>
-              <a:rPr sz="4200" b="1">
+              <a:rPr sz="4200" b="1" i="0">
                 <a:solidFill>
                   <a:srgbClr val="030303"/>
                 </a:solidFill>
@@ -3737,7 +3737,7 @@
               </a:lnSpc>
             </a:pPr>
             <a:r>
-              <a:rPr sz="2600" b="1">
+              <a:rPr sz="2600" b="1" i="0">
                 <a:solidFill>
                   <a:srgbClr val="030303"/>
                 </a:solidFill>
@@ -3753,7 +3753,7 @@
               </a:lnSpc>
             </a:pPr>
             <a:r>
-              <a:rPr sz="2600" b="1">
+              <a:rPr sz="2600" b="1" i="0">
                 <a:solidFill>
                   <a:srgbClr val="030303"/>
                 </a:solidFill>
